--- a/videos/machine-learning/03_ridger_regression_gradient_descent/recreated_pptx/slide_025_recreated.pptx
+++ b/videos/machine-learning/03_ridger_regression_gradient_descent/recreated_pptx/slide_025_recreated.pptx
@@ -1069,7 +1069,7 @@
       </p:sp>
       <p:pic>
         <p:nvPicPr>
-          <p:cNvPr id="9" name="Image 0" descr="/workspaces/codespaces-blank/ai_llm_slides/videos/machine-learning/03_ridger_regression_gradient_descent/recreated_pptx/build/assets/plot_025_tl.png">    </p:cNvPr>
+          <p:cNvPr id="9" name="Image 0" descr="/home/ahmed/Projects/ai_llm_slides/videos/machine-learning/03_ridger_regression_gradient_descent/recreated_pptx/build/assets/plot_025_tl.png">    </p:cNvPr>
           <p:cNvPicPr>
             <a:picLocks noChangeAspect="1"/>
           </p:cNvPicPr>
@@ -1093,7 +1093,7 @@
       </p:pic>
       <p:pic>
         <p:nvPicPr>
-          <p:cNvPr id="10" name="Image 1" descr="/workspaces/codespaces-blank/ai_llm_slides/videos/machine-learning/03_ridger_regression_gradient_descent/recreated_pptx/build/assets/plot_025_tr.png">    </p:cNvPr>
+          <p:cNvPr id="10" name="Image 1" descr="/home/ahmed/Projects/ai_llm_slides/videos/machine-learning/03_ridger_regression_gradient_descent/recreated_pptx/build/assets/plot_025_tr.png">    </p:cNvPr>
           <p:cNvPicPr>
             <a:picLocks noChangeAspect="1"/>
           </p:cNvPicPr>
@@ -1117,7 +1117,7 @@
       </p:pic>
       <p:pic>
         <p:nvPicPr>
-          <p:cNvPr id="11" name="Image 2" descr="/workspaces/codespaces-blank/ai_llm_slides/videos/machine-learning/03_ridger_regression_gradient_descent/recreated_pptx/build/assets/plot_025_bl.png">    </p:cNvPr>
+          <p:cNvPr id="11" name="Image 2" descr="/home/ahmed/Projects/ai_llm_slides/videos/machine-learning/03_ridger_regression_gradient_descent/recreated_pptx/build/assets/plot_025_bl.png">    </p:cNvPr>
           <p:cNvPicPr>
             <a:picLocks noChangeAspect="1"/>
           </p:cNvPicPr>
@@ -1141,7 +1141,7 @@
       </p:pic>
       <p:pic>
         <p:nvPicPr>
-          <p:cNvPr id="12" name="Image 3" descr="/workspaces/codespaces-blank/ai_llm_slides/videos/machine-learning/03_ridger_regression_gradient_descent/recreated_pptx/build/assets/plot_025_br.png">    </p:cNvPr>
+          <p:cNvPr id="12" name="Image 3" descr="/home/ahmed/Projects/ai_llm_slides/videos/machine-learning/03_ridger_regression_gradient_descent/recreated_pptx/build/assets/plot_025_br.png">    </p:cNvPr>
           <p:cNvPicPr>
             <a:picLocks noChangeAspect="1"/>
           </p:cNvPicPr>
@@ -1170,6 +1170,52 @@
           <p:nvPr/>
         </p:nvSpPr>
         <p:spPr>
+          <a:xfrm flipV="1">
+            <a:off x="8318500" y="2400300"/>
+            <a:ext cx="2603500" cy="254000"/>
+          </a:xfrm>
+          <a:prstGeom prst="line">
+            <a:avLst/>
+          </a:prstGeom>
+          <a:noFill/>
+          <a:ln w="12700">
+            <a:solidFill>
+              <a:srgbClr val="C00000"/>
+            </a:solidFill>
+            <a:prstDash val="solid"/>
+          </a:ln>
+        </p:spPr>
+      </p:sp>
+      <p:sp>
+        <p:nvSpPr>
+          <p:cNvPr id="14" name="Shape 8"/>
+          <p:cNvSpPr/>
+          <p:nvPr/>
+        </p:nvSpPr>
+        <p:spPr>
+          <a:xfrm>
+            <a:off x="9359900" y="2667000"/>
+            <a:ext cx="228600" cy="190500"/>
+          </a:xfrm>
+          <a:prstGeom prst="line">
+            <a:avLst/>
+          </a:prstGeom>
+          <a:noFill/>
+          <a:ln w="12700">
+            <a:solidFill>
+              <a:srgbClr val="C00000"/>
+            </a:solidFill>
+            <a:prstDash val="solid"/>
+          </a:ln>
+        </p:spPr>
+      </p:sp>
+      <p:sp>
+        <p:nvSpPr>
+          <p:cNvPr id="15" name="Shape 9"/>
+          <p:cNvSpPr/>
+          <p:nvPr/>
+        </p:nvSpPr>
+        <p:spPr>
           <a:xfrm>
             <a:off x="1511300" y="2133600"/>
             <a:ext cx="1892300" cy="25400"/>
@@ -1185,7 +1231,7 @@
       </p:sp>
       <p:sp>
         <p:nvSpPr>
-          <p:cNvPr id="14" name="Shape 8"/>
+          <p:cNvPr id="16" name="Shape 10"/>
           <p:cNvSpPr/>
           <p:nvPr/>
         </p:nvSpPr>
@@ -1205,7 +1251,27 @@
       </p:sp>
       <p:sp>
         <p:nvSpPr>
-          <p:cNvPr id="15" name="Shape 9"/>
+          <p:cNvPr id="17" name="Shape 11"/>
+          <p:cNvSpPr/>
+          <p:nvPr/>
+        </p:nvSpPr>
+        <p:spPr>
+          <a:xfrm>
+            <a:off x="1117600" y="2540000"/>
+            <a:ext cx="2374900" cy="25400"/>
+          </a:xfrm>
+          <a:prstGeom prst="rect">
+            <a:avLst/>
+          </a:prstGeom>
+          <a:solidFill>
+            <a:srgbClr val="C00000"/>
+          </a:solidFill>
+          <a:ln/>
+        </p:spPr>
+      </p:sp>
+      <p:sp>
+        <p:nvSpPr>
+          <p:cNvPr id="18" name="Shape 12"/>
           <p:cNvSpPr/>
           <p:nvPr/>
         </p:nvSpPr>
@@ -1225,7 +1291,7 @@
       </p:sp>
       <p:sp>
         <p:nvSpPr>
-          <p:cNvPr id="16" name="Shape 10"/>
+          <p:cNvPr id="19" name="Shape 13"/>
           <p:cNvSpPr/>
           <p:nvPr/>
         </p:nvSpPr>
@@ -1245,7 +1311,7 @@
       </p:sp>
       <p:sp>
         <p:nvSpPr>
-          <p:cNvPr id="17" name="Shape 11"/>
+          <p:cNvPr id="20" name="Shape 14"/>
           <p:cNvSpPr/>
           <p:nvPr/>
         </p:nvSpPr>
@@ -1265,7 +1331,7 @@
       </p:sp>
       <p:sp>
         <p:nvSpPr>
-          <p:cNvPr id="18" name="Shape 12"/>
+          <p:cNvPr id="21" name="Shape 15"/>
           <p:cNvSpPr/>
           <p:nvPr/>
         </p:nvSpPr>
@@ -1278,14 +1344,14 @@
             <a:avLst/>
           </a:prstGeom>
           <a:solidFill>
-            <a:srgbClr val="0000FF"/>
+            <a:srgbClr val="0000A0"/>
           </a:solidFill>
           <a:ln/>
         </p:spPr>
       </p:sp>
       <p:sp>
         <p:nvSpPr>
-          <p:cNvPr id="19" name="Text 13"/>
+          <p:cNvPr id="22" name="Text 16"/>
           <p:cNvSpPr/>
           <p:nvPr/>
         </p:nvSpPr>
@@ -1304,6 +1370,23 @@
           <a:bodyPr wrap="square" lIns="0" tIns="0" rIns="0" bIns="0" rtlCol="0" anchor="ctr"/>
           <a:lstStyle/>
           <a:p>
+            <a:pPr algn="ctr" indent="0" marL="0">
+              <a:lnSpc>
+                <a:spcPts val="1200"/>
+              </a:lnSpc>
+              <a:buNone/>
+            </a:pPr>
+            <a:r>
+              <a:rPr lang="en-US" sz="1100" b="1" dirty="0">
+                <a:solidFill>
+                  <a:srgbClr val="FFFF00"/>
+                </a:solidFill>
+                <a:latin typeface="Arial" pitchFamily="34" charset="0"/>
+                <a:ea typeface="Arial" pitchFamily="34" charset="-122"/>
+                <a:cs typeface="Arial" pitchFamily="34" charset="-120"/>
+              </a:rPr>
+              <a:t>Concave</a:t>
+            </a:r>
             <a:pPr algn="ctr" indent="0" marL="0">
               <a:lnSpc>
                 <a:spcPts val="1200"/>
@@ -1319,52 +1402,10 @@
                 <a:ea typeface="Arial" pitchFamily="34" charset="-122"/>
                 <a:cs typeface="Arial" pitchFamily="34" charset="-120"/>
               </a:rPr>
-              <a:t>Concave Function One Maxima</a:t>
+              <a:t> Function</a:t>
             </a:r>
             <a:endParaRPr lang="en-US" sz="1100" dirty="0"/>
           </a:p>
-        </p:txBody>
-      </p:sp>
-      <p:sp>
-        <p:nvSpPr>
-          <p:cNvPr id="20" name="Shape 14"/>
-          <p:cNvSpPr/>
-          <p:nvPr/>
-        </p:nvSpPr>
-        <p:spPr>
-          <a:xfrm>
-            <a:off x="6032500" y="2336800"/>
-            <a:ext cx="1739900" cy="533400"/>
-          </a:xfrm>
-          <a:prstGeom prst="rect">
-            <a:avLst/>
-          </a:prstGeom>
-          <a:solidFill>
-            <a:srgbClr val="0000FF"/>
-          </a:solidFill>
-          <a:ln/>
-        </p:spPr>
-      </p:sp>
-      <p:sp>
-        <p:nvSpPr>
-          <p:cNvPr id="21" name="Text 15"/>
-          <p:cNvSpPr/>
-          <p:nvPr/>
-        </p:nvSpPr>
-        <p:spPr>
-          <a:xfrm>
-            <a:off x="6032500" y="2336800"/>
-            <a:ext cx="1739900" cy="533400"/>
-          </a:xfrm>
-          <a:prstGeom prst="rect">
-            <a:avLst/>
-          </a:prstGeom>
-          <a:noFill/>
-          <a:ln/>
-        </p:spPr>
-        <p:txBody>
-          <a:bodyPr wrap="square" lIns="0" tIns="0" rIns="0" bIns="0" rtlCol="0" anchor="ctr"/>
-          <a:lstStyle/>
           <a:p>
             <a:pPr algn="ctr" indent="0" marL="0">
               <a:lnSpc>
@@ -1381,7 +1422,7 @@
                 <a:ea typeface="Arial" pitchFamily="34" charset="-122"/>
                 <a:cs typeface="Arial" pitchFamily="34" charset="-120"/>
               </a:rPr>
-              <a:t>Convex Function One Minima</a:t>
+              <a:t>One Maxima</a:t>
             </a:r>
             <a:endParaRPr lang="en-US" sz="1100" dirty="0"/>
           </a:p>
@@ -1389,34 +1430,34 @@
       </p:sp>
       <p:sp>
         <p:nvSpPr>
-          <p:cNvPr id="22" name="Shape 16"/>
-          <p:cNvSpPr/>
-          <p:nvPr/>
-        </p:nvSpPr>
-        <p:spPr>
-          <a:xfrm>
-            <a:off x="6019800" y="4495800"/>
-            <a:ext cx="1752600" cy="482600"/>
-          </a:xfrm>
-          <a:prstGeom prst="rect">
-            <a:avLst/>
-          </a:prstGeom>
-          <a:solidFill>
-            <a:srgbClr val="0000FF"/>
+          <p:cNvPr id="23" name="Shape 17"/>
+          <p:cNvSpPr/>
+          <p:nvPr/>
+        </p:nvSpPr>
+        <p:spPr>
+          <a:xfrm>
+            <a:off x="6032500" y="2336800"/>
+            <a:ext cx="1739900" cy="533400"/>
+          </a:xfrm>
+          <a:prstGeom prst="rect">
+            <a:avLst/>
+          </a:prstGeom>
+          <a:solidFill>
+            <a:srgbClr val="0000A0"/>
           </a:solidFill>
           <a:ln/>
         </p:spPr>
       </p:sp>
       <p:sp>
         <p:nvSpPr>
-          <p:cNvPr id="23" name="Text 17"/>
-          <p:cNvSpPr/>
-          <p:nvPr/>
-        </p:nvSpPr>
-        <p:spPr>
-          <a:xfrm>
-            <a:off x="6019800" y="4495800"/>
-            <a:ext cx="1752600" cy="482600"/>
+          <p:cNvPr id="24" name="Text 18"/>
+          <p:cNvSpPr/>
+          <p:nvPr/>
+        </p:nvSpPr>
+        <p:spPr>
+          <a:xfrm>
+            <a:off x="6032500" y="2336800"/>
+            <a:ext cx="1739900" cy="533400"/>
           </a:xfrm>
           <a:prstGeom prst="rect">
             <a:avLst/>
@@ -1428,6 +1469,23 @@
           <a:bodyPr wrap="square" lIns="0" tIns="0" rIns="0" bIns="0" rtlCol="0" anchor="ctr"/>
           <a:lstStyle/>
           <a:p>
+            <a:pPr algn="ctr" indent="0" marL="0">
+              <a:lnSpc>
+                <a:spcPts val="1200"/>
+              </a:lnSpc>
+              <a:buNone/>
+            </a:pPr>
+            <a:r>
+              <a:rPr lang="en-US" sz="1100" b="1" dirty="0">
+                <a:solidFill>
+                  <a:srgbClr val="FFFF00"/>
+                </a:solidFill>
+                <a:latin typeface="Arial" pitchFamily="34" charset="0"/>
+                <a:ea typeface="Arial" pitchFamily="34" charset="-122"/>
+                <a:cs typeface="Arial" pitchFamily="34" charset="-120"/>
+              </a:rPr>
+              <a:t>Convex</a:t>
+            </a:r>
             <a:pPr algn="ctr" indent="0" marL="0">
               <a:lnSpc>
                 <a:spcPts val="1200"/>
@@ -1443,52 +1501,10 @@
                 <a:ea typeface="Arial" pitchFamily="34" charset="-122"/>
                 <a:cs typeface="Arial" pitchFamily="34" charset="-120"/>
               </a:rPr>
-              <a:t>Gradient Descent Path to reach Minima</a:t>
+              <a:t> Function</a:t>
             </a:r>
             <a:endParaRPr lang="en-US" sz="1100" dirty="0"/>
           </a:p>
-        </p:txBody>
-      </p:sp>
-      <p:sp>
-        <p:nvSpPr>
-          <p:cNvPr id="24" name="Shape 18"/>
-          <p:cNvSpPr/>
-          <p:nvPr/>
-        </p:nvSpPr>
-        <p:spPr>
-          <a:xfrm>
-            <a:off x="4851400" y="5740400"/>
-            <a:ext cx="1739900" cy="482600"/>
-          </a:xfrm>
-          <a:prstGeom prst="rect">
-            <a:avLst/>
-          </a:prstGeom>
-          <a:solidFill>
-            <a:srgbClr val="0000FF"/>
-          </a:solidFill>
-          <a:ln/>
-        </p:spPr>
-      </p:sp>
-      <p:sp>
-        <p:nvSpPr>
-          <p:cNvPr id="25" name="Text 19"/>
-          <p:cNvSpPr/>
-          <p:nvPr/>
-        </p:nvSpPr>
-        <p:spPr>
-          <a:xfrm>
-            <a:off x="4851400" y="5740400"/>
-            <a:ext cx="1739900" cy="482600"/>
-          </a:xfrm>
-          <a:prstGeom prst="rect">
-            <a:avLst/>
-          </a:prstGeom>
-          <a:noFill/>
-          <a:ln/>
-        </p:spPr>
-        <p:txBody>
-          <a:bodyPr wrap="square" lIns="0" tIns="0" rIns="0" bIns="0" rtlCol="0" anchor="ctr"/>
-          <a:lstStyle/>
           <a:p>
             <a:pPr algn="ctr" indent="0" marL="0">
               <a:lnSpc>
@@ -1505,7 +1521,171 @@
                 <a:ea typeface="Arial" pitchFamily="34" charset="-122"/>
                 <a:cs typeface="Arial" pitchFamily="34" charset="-120"/>
               </a:rPr>
-              <a:t>Non-Convex Multiple Minima</a:t>
+              <a:t>One Minima</a:t>
+            </a:r>
+            <a:endParaRPr lang="en-US" sz="1100" dirty="0"/>
+          </a:p>
+        </p:txBody>
+      </p:sp>
+      <p:sp>
+        <p:nvSpPr>
+          <p:cNvPr id="25" name="Shape 19"/>
+          <p:cNvSpPr/>
+          <p:nvPr/>
+        </p:nvSpPr>
+        <p:spPr>
+          <a:xfrm>
+            <a:off x="6019800" y="4495800"/>
+            <a:ext cx="1752600" cy="482600"/>
+          </a:xfrm>
+          <a:prstGeom prst="rect">
+            <a:avLst/>
+          </a:prstGeom>
+          <a:solidFill>
+            <a:srgbClr val="0000A0"/>
+          </a:solidFill>
+          <a:ln/>
+        </p:spPr>
+      </p:sp>
+      <p:sp>
+        <p:nvSpPr>
+          <p:cNvPr id="26" name="Text 20"/>
+          <p:cNvSpPr/>
+          <p:nvPr/>
+        </p:nvSpPr>
+        <p:spPr>
+          <a:xfrm>
+            <a:off x="6019800" y="4495800"/>
+            <a:ext cx="1752600" cy="482600"/>
+          </a:xfrm>
+          <a:prstGeom prst="rect">
+            <a:avLst/>
+          </a:prstGeom>
+          <a:noFill/>
+          <a:ln/>
+        </p:spPr>
+        <p:txBody>
+          <a:bodyPr wrap="square" lIns="0" tIns="0" rIns="0" bIns="0" rtlCol="0" anchor="ctr"/>
+          <a:lstStyle/>
+          <a:p>
+            <a:pPr algn="ctr" indent="0" marL="0">
+              <a:lnSpc>
+                <a:spcPts val="1200"/>
+              </a:lnSpc>
+              <a:buNone/>
+            </a:pPr>
+            <a:r>
+              <a:rPr lang="en-US" sz="1100" b="1" dirty="0">
+                <a:solidFill>
+                  <a:srgbClr val="FFFFFF"/>
+                </a:solidFill>
+                <a:latin typeface="Arial" pitchFamily="34" charset="0"/>
+                <a:ea typeface="Arial" pitchFamily="34" charset="-122"/>
+                <a:cs typeface="Arial" pitchFamily="34" charset="-120"/>
+              </a:rPr>
+              <a:t>Gradient Descent</a:t>
+            </a:r>
+            <a:endParaRPr lang="en-US" sz="1100" dirty="0"/>
+          </a:p>
+          <a:p>
+            <a:pPr algn="ctr" indent="0" marL="0">
+              <a:lnSpc>
+                <a:spcPts val="1200"/>
+              </a:lnSpc>
+              <a:buNone/>
+            </a:pPr>
+            <a:r>
+              <a:rPr lang="en-US" sz="1100" b="1" dirty="0">
+                <a:solidFill>
+                  <a:srgbClr val="FFFFFF"/>
+                </a:solidFill>
+                <a:latin typeface="Arial" pitchFamily="34" charset="0"/>
+                <a:ea typeface="Arial" pitchFamily="34" charset="-122"/>
+                <a:cs typeface="Arial" pitchFamily="34" charset="-120"/>
+              </a:rPr>
+              <a:t>Path to reach Minima</a:t>
+            </a:r>
+            <a:endParaRPr lang="en-US" sz="1100" dirty="0"/>
+          </a:p>
+        </p:txBody>
+      </p:sp>
+      <p:sp>
+        <p:nvSpPr>
+          <p:cNvPr id="27" name="Shape 21"/>
+          <p:cNvSpPr/>
+          <p:nvPr/>
+        </p:nvSpPr>
+        <p:spPr>
+          <a:xfrm>
+            <a:off x="4851400" y="5740400"/>
+            <a:ext cx="1739900" cy="482600"/>
+          </a:xfrm>
+          <a:prstGeom prst="rect">
+            <a:avLst/>
+          </a:prstGeom>
+          <a:solidFill>
+            <a:srgbClr val="0000A0"/>
+          </a:solidFill>
+          <a:ln/>
+        </p:spPr>
+      </p:sp>
+      <p:sp>
+        <p:nvSpPr>
+          <p:cNvPr id="28" name="Text 22"/>
+          <p:cNvSpPr/>
+          <p:nvPr/>
+        </p:nvSpPr>
+        <p:spPr>
+          <a:xfrm>
+            <a:off x="4851400" y="5740400"/>
+            <a:ext cx="1739900" cy="482600"/>
+          </a:xfrm>
+          <a:prstGeom prst="rect">
+            <a:avLst/>
+          </a:prstGeom>
+          <a:noFill/>
+          <a:ln/>
+        </p:spPr>
+        <p:txBody>
+          <a:bodyPr wrap="square" lIns="0" tIns="0" rIns="0" bIns="0" rtlCol="0" anchor="ctr"/>
+          <a:lstStyle/>
+          <a:p>
+            <a:pPr algn="ctr" indent="0" marL="0">
+              <a:lnSpc>
+                <a:spcPts val="1200"/>
+              </a:lnSpc>
+              <a:buNone/>
+            </a:pPr>
+            <a:r>
+              <a:rPr lang="en-US" sz="1100" b="1" dirty="0">
+                <a:solidFill>
+                  <a:srgbClr val="FFFFFF"/>
+                </a:solidFill>
+                <a:latin typeface="Arial" pitchFamily="34" charset="0"/>
+                <a:ea typeface="Arial" pitchFamily="34" charset="-122"/>
+                <a:cs typeface="Arial" pitchFamily="34" charset="-120"/>
+              </a:rPr>
+              <a:t>Non-Convex</a:t>
+            </a:r>
+            <a:endParaRPr lang="en-US" sz="1100" dirty="0"/>
+          </a:p>
+          <a:p>
+            <a:pPr algn="ctr" indent="0" marL="0">
+              <a:lnSpc>
+                <a:spcPts val="1200"/>
+              </a:lnSpc>
+              <a:buNone/>
+            </a:pPr>
+            <a:r>
+              <a:rPr lang="en-US" sz="1100" b="1" dirty="0">
+                <a:solidFill>
+                  <a:srgbClr val="FFFFFF"/>
+                </a:solidFill>
+                <a:latin typeface="Arial" pitchFamily="34" charset="0"/>
+                <a:ea typeface="Arial" pitchFamily="34" charset="-122"/>
+                <a:cs typeface="Arial" pitchFamily="34" charset="-120"/>
+              </a:rPr>
+              <a:t>Multiple Minima</a:t>
             </a:r>
             <a:endParaRPr lang="en-US" sz="1100" dirty="0"/>
           </a:p>
